--- a/materials/images_hochformat.pptx
+++ b/materials/images_hochformat.pptx
@@ -256,7 +256,7 @@
           <a:p>
             <a:fld id="{F39F49B5-785A-44C4-99F0-898FF83CD003}" type="datetimeFigureOut">
               <a:rPr lang="de-DE" smtClean="0"/>
-              <a:t>17.07.2025</a:t>
+              <a:t>30.10.2025</a:t>
             </a:fld>
             <a:endParaRPr lang="de-DE"/>
           </a:p>
@@ -426,7 +426,7 @@
           <a:p>
             <a:fld id="{F39F49B5-785A-44C4-99F0-898FF83CD003}" type="datetimeFigureOut">
               <a:rPr lang="de-DE" smtClean="0"/>
-              <a:t>17.07.2025</a:t>
+              <a:t>30.10.2025</a:t>
             </a:fld>
             <a:endParaRPr lang="de-DE"/>
           </a:p>
@@ -606,7 +606,7 @@
           <a:p>
             <a:fld id="{F39F49B5-785A-44C4-99F0-898FF83CD003}" type="datetimeFigureOut">
               <a:rPr lang="de-DE" smtClean="0"/>
-              <a:t>17.07.2025</a:t>
+              <a:t>30.10.2025</a:t>
             </a:fld>
             <a:endParaRPr lang="de-DE"/>
           </a:p>
@@ -776,7 +776,7 @@
           <a:p>
             <a:fld id="{F39F49B5-785A-44C4-99F0-898FF83CD003}" type="datetimeFigureOut">
               <a:rPr lang="de-DE" smtClean="0"/>
-              <a:t>17.07.2025</a:t>
+              <a:t>30.10.2025</a:t>
             </a:fld>
             <a:endParaRPr lang="de-DE"/>
           </a:p>
@@ -1020,7 +1020,7 @@
           <a:p>
             <a:fld id="{F39F49B5-785A-44C4-99F0-898FF83CD003}" type="datetimeFigureOut">
               <a:rPr lang="de-DE" smtClean="0"/>
-              <a:t>17.07.2025</a:t>
+              <a:t>30.10.2025</a:t>
             </a:fld>
             <a:endParaRPr lang="de-DE"/>
           </a:p>
@@ -1252,7 +1252,7 @@
           <a:p>
             <a:fld id="{F39F49B5-785A-44C4-99F0-898FF83CD003}" type="datetimeFigureOut">
               <a:rPr lang="de-DE" smtClean="0"/>
-              <a:t>17.07.2025</a:t>
+              <a:t>30.10.2025</a:t>
             </a:fld>
             <a:endParaRPr lang="de-DE"/>
           </a:p>
@@ -1619,7 +1619,7 @@
           <a:p>
             <a:fld id="{F39F49B5-785A-44C4-99F0-898FF83CD003}" type="datetimeFigureOut">
               <a:rPr lang="de-DE" smtClean="0"/>
-              <a:t>17.07.2025</a:t>
+              <a:t>30.10.2025</a:t>
             </a:fld>
             <a:endParaRPr lang="de-DE"/>
           </a:p>
@@ -1737,7 +1737,7 @@
           <a:p>
             <a:fld id="{F39F49B5-785A-44C4-99F0-898FF83CD003}" type="datetimeFigureOut">
               <a:rPr lang="de-DE" smtClean="0"/>
-              <a:t>17.07.2025</a:t>
+              <a:t>30.10.2025</a:t>
             </a:fld>
             <a:endParaRPr lang="de-DE"/>
           </a:p>
@@ -1832,7 +1832,7 @@
           <a:p>
             <a:fld id="{F39F49B5-785A-44C4-99F0-898FF83CD003}" type="datetimeFigureOut">
               <a:rPr lang="de-DE" smtClean="0"/>
-              <a:t>17.07.2025</a:t>
+              <a:t>30.10.2025</a:t>
             </a:fld>
             <a:endParaRPr lang="de-DE"/>
           </a:p>
@@ -2109,7 +2109,7 @@
           <a:p>
             <a:fld id="{F39F49B5-785A-44C4-99F0-898FF83CD003}" type="datetimeFigureOut">
               <a:rPr lang="de-DE" smtClean="0"/>
-              <a:t>17.07.2025</a:t>
+              <a:t>30.10.2025</a:t>
             </a:fld>
             <a:endParaRPr lang="de-DE"/>
           </a:p>
@@ -2366,7 +2366,7 @@
           <a:p>
             <a:fld id="{F39F49B5-785A-44C4-99F0-898FF83CD003}" type="datetimeFigureOut">
               <a:rPr lang="de-DE" smtClean="0"/>
-              <a:t>17.07.2025</a:t>
+              <a:t>30.10.2025</a:t>
             </a:fld>
             <a:endParaRPr lang="de-DE"/>
           </a:p>
@@ -2579,7 +2579,7 @@
           <a:p>
             <a:fld id="{F39F49B5-785A-44C4-99F0-898FF83CD003}" type="datetimeFigureOut">
               <a:rPr lang="de-DE" smtClean="0"/>
-              <a:t>17.07.2025</a:t>
+              <a:t>30.10.2025</a:t>
             </a:fld>
             <a:endParaRPr lang="de-DE"/>
           </a:p>
@@ -7401,7 +7401,7 @@
         <p:spPr>
           <a:xfrm>
             <a:off x="915069" y="4716380"/>
-            <a:ext cx="11598442" cy="23836498"/>
+            <a:ext cx="11598442" cy="22944220"/>
           </a:xfrm>
           <a:prstGeom prst="roundRect">
             <a:avLst/>
@@ -7511,7 +7511,7 @@
         </p:nvSpPr>
         <p:spPr>
           <a:xfrm>
-            <a:off x="3198204" y="6275735"/>
+            <a:off x="3212854" y="8359924"/>
             <a:ext cx="7032172" cy="1336244"/>
           </a:xfrm>
           <a:prstGeom prst="rect">
@@ -7570,7 +7570,7 @@
         </p:nvSpPr>
         <p:spPr>
           <a:xfrm>
-            <a:off x="3198204" y="8647592"/>
+            <a:off x="3212854" y="10450034"/>
             <a:ext cx="7032172" cy="1336244"/>
           </a:xfrm>
           <a:prstGeom prst="rect">
@@ -7627,14 +7627,14 @@
           <p:cNvCxnSpPr>
             <a:cxnSpLocks/>
             <a:stCxn id="3" idx="2"/>
-            <a:endCxn id="4" idx="0"/>
+            <a:endCxn id="55" idx="0"/>
           </p:cNvCxnSpPr>
           <p:nvPr/>
         </p:nvCxnSpPr>
         <p:spPr>
           <a:xfrm>
             <a:off x="6714290" y="4039048"/>
-            <a:ext cx="0" cy="2236687"/>
+            <a:ext cx="14650" cy="2121647"/>
           </a:xfrm>
           <a:prstGeom prst="straightConnector1">
             <a:avLst/>
@@ -7672,15 +7672,15 @@
           </p:cNvPr>
           <p:cNvCxnSpPr>
             <a:cxnSpLocks/>
-            <a:stCxn id="4" idx="2"/>
-            <a:endCxn id="5" idx="0"/>
+            <a:stCxn id="55" idx="2"/>
+            <a:endCxn id="4" idx="0"/>
           </p:cNvCxnSpPr>
           <p:nvPr/>
         </p:nvCxnSpPr>
         <p:spPr>
           <a:xfrm>
-            <a:off x="6714290" y="7611979"/>
-            <a:ext cx="0" cy="1035613"/>
+            <a:off x="6728940" y="7496939"/>
+            <a:ext cx="0" cy="862985"/>
           </a:xfrm>
           <a:prstGeom prst="straightConnector1">
             <a:avLst/>
@@ -7721,7 +7721,7 @@
         </p:nvSpPr>
         <p:spPr>
           <a:xfrm>
-            <a:off x="5634290" y="10689103"/>
+            <a:off x="5648940" y="12657299"/>
             <a:ext cx="2160000" cy="2160000"/>
           </a:xfrm>
           <a:prstGeom prst="ellipse">
@@ -7777,12 +7777,12 @@
         </p:nvCxnSpPr>
         <p:spPr>
           <a:xfrm rot="10800000" flipV="1">
-            <a:off x="5634291" y="5279489"/>
-            <a:ext cx="1161379" cy="6489613"/>
+            <a:off x="5648941" y="5279489"/>
+            <a:ext cx="1146729" cy="8457809"/>
           </a:xfrm>
           <a:prstGeom prst="bentConnector3">
             <a:avLst>
-              <a:gd name="adj1" fmla="val 369007"/>
+              <a:gd name="adj1" fmla="val 418959"/>
             </a:avLst>
           </a:prstGeom>
           <a:ln w="152400">
@@ -7821,7 +7821,7 @@
         </p:nvSpPr>
         <p:spPr>
           <a:xfrm>
-            <a:off x="3198204" y="13695363"/>
+            <a:off x="3212854" y="6160695"/>
             <a:ext cx="7032172" cy="1336244"/>
           </a:xfrm>
           <a:prstGeom prst="rect">
@@ -7877,61 +7877,15 @@
           </p:cNvPr>
           <p:cNvCxnSpPr>
             <a:cxnSpLocks/>
-            <a:stCxn id="5" idx="2"/>
-            <a:endCxn id="17" idx="0"/>
+            <a:stCxn id="4" idx="2"/>
+            <a:endCxn id="5" idx="0"/>
           </p:cNvCxnSpPr>
           <p:nvPr/>
         </p:nvCxnSpPr>
         <p:spPr>
           <a:xfrm>
-            <a:off x="6714290" y="9983836"/>
-            <a:ext cx="0" cy="705267"/>
-          </a:xfrm>
-          <a:prstGeom prst="straightConnector1">
-            <a:avLst/>
-          </a:prstGeom>
-          <a:ln w="152400">
-            <a:solidFill>
-              <a:schemeClr val="tx1"/>
-            </a:solidFill>
-            <a:tailEnd type="triangle"/>
-          </a:ln>
-        </p:spPr>
-        <p:style>
-          <a:lnRef idx="1">
-            <a:schemeClr val="accent1"/>
-          </a:lnRef>
-          <a:fillRef idx="0">
-            <a:schemeClr val="accent1"/>
-          </a:fillRef>
-          <a:effectRef idx="0">
-            <a:schemeClr val="accent1"/>
-          </a:effectRef>
-          <a:fontRef idx="minor">
-            <a:schemeClr val="tx1"/>
-          </a:fontRef>
-        </p:style>
-      </p:cxnSp>
-      <p:cxnSp>
-        <p:nvCxnSpPr>
-          <p:cNvPr id="87" name="Gerade Verbindung mit Pfeil 86">
-            <a:extLst>
-              <a:ext uri="{FF2B5EF4-FFF2-40B4-BE49-F238E27FC236}">
-                <a16:creationId xmlns:a16="http://schemas.microsoft.com/office/drawing/2014/main" id="{D2BD0A44-629D-EA8B-683E-BDA7612E89A0}"/>
-              </a:ext>
-            </a:extLst>
-          </p:cNvPr>
-          <p:cNvCxnSpPr>
-            <a:cxnSpLocks/>
-            <a:stCxn id="17" idx="4"/>
-            <a:endCxn id="55" idx="0"/>
-          </p:cNvCxnSpPr>
-          <p:nvPr/>
-        </p:nvCxnSpPr>
-        <p:spPr>
-          <a:xfrm>
-            <a:off x="6714290" y="12849103"/>
-            <a:ext cx="0" cy="846260"/>
+            <a:off x="6728940" y="9696168"/>
+            <a:ext cx="0" cy="753866"/>
           </a:xfrm>
           <a:prstGeom prst="straightConnector1">
             <a:avLst/>
@@ -8784,6 +8738,21 @@
               </a:rPr>
               <a:t>Transformer Encoder Layer </a:t>
             </a:r>
+            <a:br>
+              <a:rPr lang="en-US" sz="5400" b="1" dirty="0">
+                <a:solidFill>
+                  <a:schemeClr val="tx1"/>
+                </a:solidFill>
+              </a:rPr>
+            </a:br>
+            <a:r>
+              <a:rPr lang="en-US" sz="5400" b="1" dirty="0">
+                <a:solidFill>
+                  <a:schemeClr val="tx1"/>
+                </a:solidFill>
+              </a:rPr>
+              <a:t>(Pre-Normalization)</a:t>
+            </a:r>
           </a:p>
         </p:txBody>
       </p:sp>
@@ -8858,7 +8827,7 @@
         </p:nvSpPr>
         <p:spPr>
           <a:xfrm>
-            <a:off x="3198204" y="16366626"/>
+            <a:off x="3198204" y="18128443"/>
             <a:ext cx="7032172" cy="1336244"/>
           </a:xfrm>
           <a:prstGeom prst="rect">
@@ -8917,7 +8886,7 @@
         </p:nvSpPr>
         <p:spPr>
           <a:xfrm>
-            <a:off x="3198204" y="18738483"/>
+            <a:off x="3198204" y="20500300"/>
             <a:ext cx="7032172" cy="1336244"/>
           </a:xfrm>
           <a:prstGeom prst="rect">
@@ -8980,54 +8949,8 @@
         </p:nvCxnSpPr>
         <p:spPr>
           <a:xfrm>
-            <a:off x="6714290" y="17702870"/>
+            <a:off x="6714290" y="19464687"/>
             <a:ext cx="0" cy="1035613"/>
-          </a:xfrm>
-          <a:prstGeom prst="straightConnector1">
-            <a:avLst/>
-          </a:prstGeom>
-          <a:ln w="152400">
-            <a:solidFill>
-              <a:schemeClr val="tx1"/>
-            </a:solidFill>
-            <a:tailEnd type="triangle"/>
-          </a:ln>
-        </p:spPr>
-        <p:style>
-          <a:lnRef idx="1">
-            <a:schemeClr val="accent1"/>
-          </a:lnRef>
-          <a:fillRef idx="0">
-            <a:schemeClr val="accent1"/>
-          </a:fillRef>
-          <a:effectRef idx="0">
-            <a:schemeClr val="accent1"/>
-          </a:effectRef>
-          <a:fontRef idx="minor">
-            <a:schemeClr val="tx1"/>
-          </a:fontRef>
-        </p:style>
-      </p:cxnSp>
-      <p:cxnSp>
-        <p:nvCxnSpPr>
-          <p:cNvPr id="21" name="Gerade Verbindung mit Pfeil 20">
-            <a:extLst>
-              <a:ext uri="{FF2B5EF4-FFF2-40B4-BE49-F238E27FC236}">
-                <a16:creationId xmlns:a16="http://schemas.microsoft.com/office/drawing/2014/main" id="{C332D223-67B5-332B-3794-E8C4B15B5EB2}"/>
-              </a:ext>
-            </a:extLst>
-          </p:cNvPr>
-          <p:cNvCxnSpPr>
-            <a:cxnSpLocks/>
-            <a:stCxn id="55" idx="2"/>
-            <a:endCxn id="18" idx="0"/>
-          </p:cNvCxnSpPr>
-          <p:nvPr/>
-        </p:nvCxnSpPr>
-        <p:spPr>
-          <a:xfrm>
-            <a:off x="6714290" y="15031607"/>
-            <a:ext cx="0" cy="1335019"/>
           </a:xfrm>
           <a:prstGeom prst="straightConnector1">
             <a:avLst/>
@@ -9068,7 +8991,7 @@
         </p:nvSpPr>
         <p:spPr>
           <a:xfrm>
-            <a:off x="3198204" y="21110340"/>
+            <a:off x="3198204" y="22872157"/>
             <a:ext cx="7032172" cy="1336244"/>
           </a:xfrm>
           <a:prstGeom prst="rect">
@@ -9127,7 +9050,7 @@
         </p:nvSpPr>
         <p:spPr>
           <a:xfrm>
-            <a:off x="5634290" y="23177397"/>
+            <a:off x="5634290" y="24939214"/>
             <a:ext cx="2160000" cy="2160000"/>
           </a:xfrm>
           <a:prstGeom prst="ellipse">
@@ -9179,7 +9102,7 @@
         </p:nvSpPr>
         <p:spPr>
           <a:xfrm>
-            <a:off x="6714290" y="15117210"/>
+            <a:off x="6714290" y="16879027"/>
             <a:ext cx="2160000" cy="736421"/>
           </a:xfrm>
           <a:prstGeom prst="rect">
@@ -9226,19 +9149,20 @@
           </p:cNvPr>
           <p:cNvCxnSpPr>
             <a:cxnSpLocks/>
-            <a:stCxn id="28" idx="1"/>
+            <a:stCxn id="17" idx="3"/>
             <a:endCxn id="27" idx="2"/>
           </p:cNvCxnSpPr>
           <p:nvPr/>
         </p:nvCxnSpPr>
         <p:spPr>
-          <a:xfrm rot="10800000" flipV="1">
-            <a:off x="5634290" y="15485421"/>
-            <a:ext cx="1080000" cy="8771976"/>
-          </a:xfrm>
-          <a:prstGeom prst="bentConnector3">
+          <a:xfrm rot="5400000">
+            <a:off x="40658" y="20094607"/>
+            <a:ext cx="11518240" cy="330975"/>
+          </a:xfrm>
+          <a:prstGeom prst="bentConnector4">
             <a:avLst>
-              <a:gd name="adj1" fmla="val 375167"/>
+              <a:gd name="adj1" fmla="val 2922"/>
+              <a:gd name="adj2" fmla="val 1182076"/>
             </a:avLst>
           </a:prstGeom>
           <a:ln w="152400">
@@ -9281,7 +9205,7 @@
         </p:nvCxnSpPr>
         <p:spPr>
           <a:xfrm>
-            <a:off x="6714290" y="20074727"/>
+            <a:off x="6714290" y="21836544"/>
             <a:ext cx="0" cy="1035613"/>
           </a:xfrm>
           <a:prstGeom prst="straightConnector1">
@@ -9327,7 +9251,7 @@
         </p:nvCxnSpPr>
         <p:spPr>
           <a:xfrm>
-            <a:off x="6714290" y="22446584"/>
+            <a:off x="6714290" y="24208401"/>
             <a:ext cx="0" cy="730813"/>
           </a:xfrm>
           <a:prstGeom prst="straightConnector1">
@@ -9369,7 +9293,7 @@
         </p:nvSpPr>
         <p:spPr>
           <a:xfrm>
-            <a:off x="3198204" y="26159421"/>
+            <a:off x="3198203" y="15494631"/>
             <a:ext cx="7032172" cy="1336244"/>
           </a:xfrm>
           <a:prstGeom prst="rect">
@@ -9426,59 +9350,13 @@
           <p:cNvCxnSpPr>
             <a:cxnSpLocks/>
             <a:stCxn id="27" idx="4"/>
-            <a:endCxn id="48" idx="0"/>
           </p:cNvCxnSpPr>
           <p:nvPr/>
         </p:nvCxnSpPr>
         <p:spPr>
-          <a:xfrm>
-            <a:off x="6714290" y="25337397"/>
-            <a:ext cx="0" cy="822024"/>
-          </a:xfrm>
-          <a:prstGeom prst="straightConnector1">
-            <a:avLst/>
-          </a:prstGeom>
-          <a:ln w="152400">
-            <a:solidFill>
-              <a:schemeClr val="tx1"/>
-            </a:solidFill>
-            <a:tailEnd type="triangle"/>
-          </a:ln>
-        </p:spPr>
-        <p:style>
-          <a:lnRef idx="1">
-            <a:schemeClr val="accent1"/>
-          </a:lnRef>
-          <a:fillRef idx="0">
-            <a:schemeClr val="accent1"/>
-          </a:fillRef>
-          <a:effectRef idx="0">
-            <a:schemeClr val="accent1"/>
-          </a:effectRef>
-          <a:fontRef idx="minor">
-            <a:schemeClr val="tx1"/>
-          </a:fontRef>
-        </p:style>
-      </p:cxnSp>
-      <p:cxnSp>
-        <p:nvCxnSpPr>
-          <p:cNvPr id="53" name="Gerade Verbindung mit Pfeil 52">
-            <a:extLst>
-              <a:ext uri="{FF2B5EF4-FFF2-40B4-BE49-F238E27FC236}">
-                <a16:creationId xmlns:a16="http://schemas.microsoft.com/office/drawing/2014/main" id="{8404381C-FEC5-89C3-BFA9-66A29720394E}"/>
-              </a:ext>
-            </a:extLst>
-          </p:cNvPr>
-          <p:cNvCxnSpPr>
-            <a:cxnSpLocks/>
-            <a:stCxn id="48" idx="2"/>
-          </p:cNvCxnSpPr>
-          <p:nvPr/>
-        </p:nvCxnSpPr>
-        <p:spPr>
-          <a:xfrm>
-            <a:off x="6714290" y="27495665"/>
-            <a:ext cx="0" cy="2376593"/>
+          <a:xfrm flipH="1">
+            <a:off x="6714288" y="27099214"/>
+            <a:ext cx="2" cy="2897979"/>
           </a:xfrm>
           <a:prstGeom prst="straightConnector1">
             <a:avLst/>
@@ -9694,6 +9572,144 @@
           <a:xfrm>
             <a:off x="20285909" y="8359924"/>
             <a:ext cx="1" cy="2724031"/>
+          </a:xfrm>
+          <a:prstGeom prst="straightConnector1">
+            <a:avLst/>
+          </a:prstGeom>
+          <a:ln w="152400">
+            <a:solidFill>
+              <a:schemeClr val="tx1"/>
+            </a:solidFill>
+            <a:tailEnd type="triangle"/>
+          </a:ln>
+        </p:spPr>
+        <p:style>
+          <a:lnRef idx="1">
+            <a:schemeClr val="accent1"/>
+          </a:lnRef>
+          <a:fillRef idx="0">
+            <a:schemeClr val="accent1"/>
+          </a:fillRef>
+          <a:effectRef idx="0">
+            <a:schemeClr val="accent1"/>
+          </a:effectRef>
+          <a:fontRef idx="minor">
+            <a:schemeClr val="tx1"/>
+          </a:fontRef>
+        </p:style>
+      </p:cxnSp>
+      <p:cxnSp>
+        <p:nvCxnSpPr>
+          <p:cNvPr id="60" name="Gerade Verbindung mit Pfeil 59">
+            <a:extLst>
+              <a:ext uri="{FF2B5EF4-FFF2-40B4-BE49-F238E27FC236}">
+                <a16:creationId xmlns:a16="http://schemas.microsoft.com/office/drawing/2014/main" id="{B06E3F7B-6233-CFE5-5303-5791E2BF17C7}"/>
+              </a:ext>
+            </a:extLst>
+          </p:cNvPr>
+          <p:cNvCxnSpPr>
+            <a:cxnSpLocks/>
+            <a:stCxn id="5" idx="2"/>
+            <a:endCxn id="17" idx="0"/>
+          </p:cNvCxnSpPr>
+          <p:nvPr/>
+        </p:nvCxnSpPr>
+        <p:spPr>
+          <a:xfrm>
+            <a:off x="6728940" y="11786278"/>
+            <a:ext cx="0" cy="871021"/>
+          </a:xfrm>
+          <a:prstGeom prst="straightConnector1">
+            <a:avLst/>
+          </a:prstGeom>
+          <a:ln w="152400">
+            <a:solidFill>
+              <a:schemeClr val="tx1"/>
+            </a:solidFill>
+            <a:tailEnd type="triangle"/>
+          </a:ln>
+        </p:spPr>
+        <p:style>
+          <a:lnRef idx="1">
+            <a:schemeClr val="accent1"/>
+          </a:lnRef>
+          <a:fillRef idx="0">
+            <a:schemeClr val="accent1"/>
+          </a:fillRef>
+          <a:effectRef idx="0">
+            <a:schemeClr val="accent1"/>
+          </a:effectRef>
+          <a:fontRef idx="minor">
+            <a:schemeClr val="tx1"/>
+          </a:fontRef>
+        </p:style>
+      </p:cxnSp>
+      <p:cxnSp>
+        <p:nvCxnSpPr>
+          <p:cNvPr id="79" name="Gerade Verbindung mit Pfeil 78">
+            <a:extLst>
+              <a:ext uri="{FF2B5EF4-FFF2-40B4-BE49-F238E27FC236}">
+                <a16:creationId xmlns:a16="http://schemas.microsoft.com/office/drawing/2014/main" id="{D1D3E300-C1C5-D445-0BCF-00EB03A8AD30}"/>
+              </a:ext>
+            </a:extLst>
+          </p:cNvPr>
+          <p:cNvCxnSpPr>
+            <a:cxnSpLocks/>
+            <a:stCxn id="17" idx="4"/>
+            <a:endCxn id="48" idx="0"/>
+          </p:cNvCxnSpPr>
+          <p:nvPr/>
+        </p:nvCxnSpPr>
+        <p:spPr>
+          <a:xfrm flipH="1">
+            <a:off x="6714289" y="14817299"/>
+            <a:ext cx="14651" cy="677332"/>
+          </a:xfrm>
+          <a:prstGeom prst="straightConnector1">
+            <a:avLst/>
+          </a:prstGeom>
+          <a:ln w="152400">
+            <a:solidFill>
+              <a:schemeClr val="tx1"/>
+            </a:solidFill>
+            <a:tailEnd type="triangle"/>
+          </a:ln>
+        </p:spPr>
+        <p:style>
+          <a:lnRef idx="1">
+            <a:schemeClr val="accent1"/>
+          </a:lnRef>
+          <a:fillRef idx="0">
+            <a:schemeClr val="accent1"/>
+          </a:fillRef>
+          <a:effectRef idx="0">
+            <a:schemeClr val="accent1"/>
+          </a:effectRef>
+          <a:fontRef idx="minor">
+            <a:schemeClr val="tx1"/>
+          </a:fontRef>
+        </p:style>
+      </p:cxnSp>
+      <p:cxnSp>
+        <p:nvCxnSpPr>
+          <p:cNvPr id="83" name="Gerade Verbindung mit Pfeil 82">
+            <a:extLst>
+              <a:ext uri="{FF2B5EF4-FFF2-40B4-BE49-F238E27FC236}">
+                <a16:creationId xmlns:a16="http://schemas.microsoft.com/office/drawing/2014/main" id="{DFA38652-E56E-FA7C-3357-0B65788EAB55}"/>
+              </a:ext>
+            </a:extLst>
+          </p:cNvPr>
+          <p:cNvCxnSpPr>
+            <a:cxnSpLocks/>
+            <a:stCxn id="48" idx="2"/>
+            <a:endCxn id="18" idx="0"/>
+          </p:cNvCxnSpPr>
+          <p:nvPr/>
+        </p:nvCxnSpPr>
+        <p:spPr>
+          <a:xfrm>
+            <a:off x="6714289" y="16830875"/>
+            <a:ext cx="1" cy="1297568"/>
           </a:xfrm>
           <a:prstGeom prst="straightConnector1">
             <a:avLst/>

--- a/materials/images_hochformat.pptx
+++ b/materials/images_hochformat.pptx
@@ -256,7 +256,7 @@
           <a:p>
             <a:fld id="{F39F49B5-785A-44C4-99F0-898FF83CD003}" type="datetimeFigureOut">
               <a:rPr lang="de-DE" smtClean="0"/>
-              <a:t>30.10.2025</a:t>
+              <a:t>12.11.2025</a:t>
             </a:fld>
             <a:endParaRPr lang="de-DE"/>
           </a:p>
@@ -426,7 +426,7 @@
           <a:p>
             <a:fld id="{F39F49B5-785A-44C4-99F0-898FF83CD003}" type="datetimeFigureOut">
               <a:rPr lang="de-DE" smtClean="0"/>
-              <a:t>30.10.2025</a:t>
+              <a:t>12.11.2025</a:t>
             </a:fld>
             <a:endParaRPr lang="de-DE"/>
           </a:p>
@@ -606,7 +606,7 @@
           <a:p>
             <a:fld id="{F39F49B5-785A-44C4-99F0-898FF83CD003}" type="datetimeFigureOut">
               <a:rPr lang="de-DE" smtClean="0"/>
-              <a:t>30.10.2025</a:t>
+              <a:t>12.11.2025</a:t>
             </a:fld>
             <a:endParaRPr lang="de-DE"/>
           </a:p>
@@ -776,7 +776,7 @@
           <a:p>
             <a:fld id="{F39F49B5-785A-44C4-99F0-898FF83CD003}" type="datetimeFigureOut">
               <a:rPr lang="de-DE" smtClean="0"/>
-              <a:t>30.10.2025</a:t>
+              <a:t>12.11.2025</a:t>
             </a:fld>
             <a:endParaRPr lang="de-DE"/>
           </a:p>
@@ -1020,7 +1020,7 @@
           <a:p>
             <a:fld id="{F39F49B5-785A-44C4-99F0-898FF83CD003}" type="datetimeFigureOut">
               <a:rPr lang="de-DE" smtClean="0"/>
-              <a:t>30.10.2025</a:t>
+              <a:t>12.11.2025</a:t>
             </a:fld>
             <a:endParaRPr lang="de-DE"/>
           </a:p>
@@ -1252,7 +1252,7 @@
           <a:p>
             <a:fld id="{F39F49B5-785A-44C4-99F0-898FF83CD003}" type="datetimeFigureOut">
               <a:rPr lang="de-DE" smtClean="0"/>
-              <a:t>30.10.2025</a:t>
+              <a:t>12.11.2025</a:t>
             </a:fld>
             <a:endParaRPr lang="de-DE"/>
           </a:p>
@@ -1619,7 +1619,7 @@
           <a:p>
             <a:fld id="{F39F49B5-785A-44C4-99F0-898FF83CD003}" type="datetimeFigureOut">
               <a:rPr lang="de-DE" smtClean="0"/>
-              <a:t>30.10.2025</a:t>
+              <a:t>12.11.2025</a:t>
             </a:fld>
             <a:endParaRPr lang="de-DE"/>
           </a:p>
@@ -1737,7 +1737,7 @@
           <a:p>
             <a:fld id="{F39F49B5-785A-44C4-99F0-898FF83CD003}" type="datetimeFigureOut">
               <a:rPr lang="de-DE" smtClean="0"/>
-              <a:t>30.10.2025</a:t>
+              <a:t>12.11.2025</a:t>
             </a:fld>
             <a:endParaRPr lang="de-DE"/>
           </a:p>
@@ -1832,7 +1832,7 @@
           <a:p>
             <a:fld id="{F39F49B5-785A-44C4-99F0-898FF83CD003}" type="datetimeFigureOut">
               <a:rPr lang="de-DE" smtClean="0"/>
-              <a:t>30.10.2025</a:t>
+              <a:t>12.11.2025</a:t>
             </a:fld>
             <a:endParaRPr lang="de-DE"/>
           </a:p>
@@ -2109,7 +2109,7 @@
           <a:p>
             <a:fld id="{F39F49B5-785A-44C4-99F0-898FF83CD003}" type="datetimeFigureOut">
               <a:rPr lang="de-DE" smtClean="0"/>
-              <a:t>30.10.2025</a:t>
+              <a:t>12.11.2025</a:t>
             </a:fld>
             <a:endParaRPr lang="de-DE"/>
           </a:p>
@@ -2366,7 +2366,7 @@
           <a:p>
             <a:fld id="{F39F49B5-785A-44C4-99F0-898FF83CD003}" type="datetimeFigureOut">
               <a:rPr lang="de-DE" smtClean="0"/>
-              <a:t>30.10.2025</a:t>
+              <a:t>12.11.2025</a:t>
             </a:fld>
             <a:endParaRPr lang="de-DE"/>
           </a:p>
@@ -2579,7 +2579,7 @@
           <a:p>
             <a:fld id="{F39F49B5-785A-44C4-99F0-898FF83CD003}" type="datetimeFigureOut">
               <a:rPr lang="de-DE" smtClean="0"/>
-              <a:t>30.10.2025</a:t>
+              <a:t>12.11.2025</a:t>
             </a:fld>
             <a:endParaRPr lang="de-DE"/>
           </a:p>
@@ -10655,7 +10655,7 @@
                   <a:schemeClr val="tx1"/>
                 </a:solidFill>
               </a:rPr>
-              <a:t>Stack of Transformer Encoder Layers </a:t>
+              <a:t>Stack of N-Gram Layers </a:t>
             </a:r>
           </a:p>
         </p:txBody>
